--- a/slides/release/00__about.pptx
+++ b/slides/release/00__about.pptx
@@ -2923,7 +2923,7 @@
         </p:blipFill>
         <p:spPr>
           <a:xfrm>
-            <a:off x="3537898" y="5337651"/>
+            <a:off x="3537898" y="5844901"/>
             <a:ext cx="2296804" cy="1248887"/>
           </a:xfrm>
           <a:prstGeom prst="rect">
